--- a/docs/sgm-two-resolutions.pptx
+++ b/docs/sgm-two-resolutions.pptx
@@ -7540,7 +7540,7 @@
                 </a:solidFill>
                 <a:latin typeface="Calibri"/>
               </a:rPr>
-              <a:t>Seven targets produce the identical golden e8a95242882013f0 on the real capture — the picture is the same, only the time differs. Accuracy vs dense ground truth: bad&gt;1px 16.2%, bad&gt;2px 11.2%, MAE 3.35 — independently reproduced by another party on hardware we have never touched.</a:t>
+              <a:t>Seven targets produce the identical golden e8a95242882013f0 on the real capture — the picture is the same, only the time differs. Accuracy vs dense ground truth: bad&gt;1px 16.2%, bad&gt;2px 11.2%, MAE 3.35 — confirmed to 0.05 points by a second scoring derived from the ground-truth arrays.</a:t>
             </a:r>
           </a:p>
         </p:txBody>
